--- a/workshops/session5-neural-networks.pptx
+++ b/workshops/session5-neural-networks.pptx
@@ -507,7 +507,8 @@
           <a:p>
             <a:r>
               <a:rPr lang="en-US" dirty="0"/>
-              <a:t/>
+              <a:t>شبکهٔ عصبی: ساختمان داخلی مدل‌ها.
+سؤال شروع: «مغز انسان چطور تصمیم می‌گیرد؟»</a:t>
             </a:r>
             <a:endParaRPr lang="en-US" dirty="0"/>
           </a:p>
@@ -595,7 +596,7 @@
           <a:p>
             <a:r>
               <a:rPr lang="en-US" dirty="0"/>
-              <a:t/>
+              <a:t>مرور: پارامتر = عددهای تنظیم‌شده در آموزش.</a:t>
             </a:r>
             <a:endParaRPr lang="en-US" dirty="0"/>
           </a:p>
@@ -683,7 +684,12 @@
           <a:p>
             <a:r>
               <a:rPr lang="en-US" dirty="0"/>
-              <a:t/>
+              <a:t>مثال کارشته (نورون داور):
+داور «خانهٔ مناسب» را با عدد اجرا کنید:
+فرمول: امتیاز = (متراژ × ۲) + (موقعیت از ۱۰ × ۵) + (نور از ۱۰ × ۳)
+خانهٔ الف: ۹۰ متری، موقعیت ۸، نور ۶ ← ۱۸۰ + ۴۰ + ۱۸ = ۲۳۸ ← بیشتر از ۱۰۰ ← مناسب
+خانهٔ ب: ۳۰ متری، موقعیت ۴، نور ۲ ← ۶۰ + ۲۰ + ۶ = ۸۶ ← کمتر از ۱۰۰ ← نامناسب
+عددهای ۲، ۵، ۳ و آستانهٔ ۱۰۰ همان پارامترها هستند.</a:t>
             </a:r>
             <a:endParaRPr lang="en-US" dirty="0"/>
           </a:p>
@@ -771,7 +777,8 @@
           <a:p>
             <a:r>
               <a:rPr lang="en-US" dirty="0"/>
-              <a:t/>
+              <a:t>تصویر multi-hidden-nn.png را نشان دهید.
+توضیح: لایه‌ها مثل خط تولید هستند — هر لایه یک کار مشخص انجام می‌دهد.</a:t>
             </a:r>
             <a:endParaRPr lang="en-US" dirty="0"/>
           </a:p>
@@ -859,7 +866,11 @@
           <a:p>
             <a:r>
               <a:rPr lang="en-US" dirty="0"/>
-              <a:t/>
+              <a:t>مثال: تشخیص چهره.
+لایهٔ اول: لبه‌ها و رنگ‌ها را می‌بیند.
+لایه‌های میانی: شکل‌ها (چشم، بینی) می‌سازد.
+لایهٔ آخر: چهرهٔ کامل تشخیص می‌دهد.
+در LLM هم همین‌طور: لایه‌های پایین نحو، لایه‌های بالاتر معنا.</a:t>
             </a:r>
             <a:endParaRPr lang="en-US" dirty="0"/>
           </a:p>
@@ -947,7 +958,8 @@
           <a:p>
             <a:r>
               <a:rPr lang="en-US" dirty="0"/>
-              <a:t/>
+              <a:t>سؤال: «چرا نمی‌توانیم همهٔ کارها را با یک لایه انجام دهیم؟»
+جواب: چون بعضی مسائل (مثل تشخیص چهره) نیاز به ترکیب ویژگی‌های ساده دارند.</a:t>
             </a:r>
             <a:endParaRPr lang="en-US" dirty="0"/>
           </a:p>
@@ -1698,7 +1710,7 @@
       </p:sp>
       <p:sp>
         <p:nvSpPr>
-          <p:cNvPr id="5" name="Text 3"/>
+          <p:cNvPr id="6" name="Text 3"/>
           <p:cNvSpPr/>
           <p:nvPr/>
         </p:nvSpPr>
@@ -1737,7 +1749,7 @@
       </p:sp>
       <p:sp>
         <p:nvSpPr>
-          <p:cNvPr id="6" name="Text 4"/>
+          <p:cNvPr id="7" name="Text 4"/>
           <p:cNvSpPr/>
           <p:nvPr/>
         </p:nvSpPr>
@@ -2060,7 +2072,7 @@
       </p:sp>
       <p:sp>
         <p:nvSpPr>
-          <p:cNvPr id="7" name="Text 4"/>
+          <p:cNvPr id="8" name="Text 4"/>
           <p:cNvSpPr/>
           <p:nvPr/>
         </p:nvSpPr>
@@ -2099,7 +2111,7 @@
       </p:sp>
       <p:sp>
         <p:nvSpPr>
-          <p:cNvPr id="8" name="Text 5"/>
+          <p:cNvPr id="9" name="Text 5"/>
           <p:cNvSpPr/>
           <p:nvPr/>
         </p:nvSpPr>
@@ -2401,7 +2413,7 @@
       </p:sp>
       <p:sp>
         <p:nvSpPr>
-          <p:cNvPr id="7" name="Text 4"/>
+          <p:cNvPr id="8" name="Text 4"/>
           <p:cNvSpPr/>
           <p:nvPr/>
         </p:nvSpPr>
@@ -2440,7 +2452,7 @@
       </p:sp>
       <p:sp>
         <p:nvSpPr>
-          <p:cNvPr id="8" name="Text 5"/>
+          <p:cNvPr id="9" name="Text 5"/>
           <p:cNvSpPr/>
           <p:nvPr/>
         </p:nvSpPr>
@@ -2993,7 +3005,7 @@
       </p:sp>
       <p:sp>
         <p:nvSpPr>
-          <p:cNvPr id="17" name="Text 15"/>
+          <p:cNvPr id="18" name="Text 15"/>
           <p:cNvSpPr/>
           <p:nvPr/>
         </p:nvSpPr>
@@ -3032,7 +3044,7 @@
       </p:sp>
       <p:sp>
         <p:nvSpPr>
-          <p:cNvPr id="18" name="Text 16"/>
+          <p:cNvPr id="19" name="Text 16"/>
           <p:cNvSpPr/>
           <p:nvPr/>
         </p:nvSpPr>
@@ -3271,7 +3283,7 @@
       </p:sp>
       <p:sp>
         <p:nvSpPr>
-          <p:cNvPr id="5" name="Text 3"/>
+          <p:cNvPr id="6" name="Text 3"/>
           <p:cNvSpPr/>
           <p:nvPr/>
         </p:nvSpPr>
@@ -3310,7 +3322,7 @@
       </p:sp>
       <p:sp>
         <p:nvSpPr>
-          <p:cNvPr id="6" name="Text 4"/>
+          <p:cNvPr id="7" name="Text 4"/>
           <p:cNvSpPr/>
           <p:nvPr/>
         </p:nvSpPr>
